--- a/sayt/media/resources/2026/10/axborot-xavfsizligi-37-mavzu.pptx
+++ b/sayt/media/resources/2026/10/axborot-xavfsizligi-37-mavzu.pptx
@@ -12874,7 +12874,7 @@
                 </a:solidFill>
                 <a:latin typeface="Segoe UI"/>
               </a:rPr>
-              <a:t>Format: 7z yoki zip, shifrlash usuli: AES-256, kuchli parol kiriting…</a:t>
+              <a:t>Format: 7z, shifrlash usuli: AES-256, kuchli parol kiriting, «Шифровать имена…</a:t>
             </a:r>
           </a:p>
         </p:txBody>
